--- a/curso/pptx/S30.pptx
+++ b/curso/pptx/S30.pptx
@@ -4176,7 +4176,7 @@
                 </a:solidFill>
                 <a:latin typeface="Nunito Sans"/>
               </a:rPr>
-              <a:t>¿Sabe del tema y tiene pruebas?</a:t>
+              <a:t>他懂这个话题并且有证据吗？</a:t>
             </a:r>
           </a:p>
           <a:p>
@@ -4201,7 +4201,7 @@
                 </a:solidFill>
                 <a:latin typeface="Nunito Sans"/>
               </a:rPr>
-              <a:t>¿Cuántos lo dicen, y por qué lo dicen?</a:t>
+              <a:t>有多少人这么说，他们为什么这么说？</a:t>
             </a:r>
           </a:p>
           <a:p>
@@ -4226,7 +4226,7 @@
                 </a:solidFill>
                 <a:latin typeface="Nunito Sans"/>
               </a:rPr>
-              <a:t>¿Obedezco porque tiene razón o por miedo?</a:t>
+              <a:t>我服从是因为他有道理，还是因为害怕？</a:t>
             </a:r>
           </a:p>
         </p:txBody>

--- a/curso/pptx/S30.pptx
+++ b/curso/pptx/S30.pptx
@@ -4516,7 +4516,7 @@
                 </a:solidFill>
                 <a:latin typeface="Nunito Sans"/>
               </a:rPr>
-              <a:t>编造的广告：“在抖音上很有名的医生 Ramos 推荐 ZenSleep 帮助睡眠。已经有一百万人在用了！”</a:t>
+              <a:t>编造的广告：“在抖音上很有名的医生推荐 ZenSleep 帮助睡眠。已经有一百万人在用了！”</a:t>
             </a:r>
           </a:p>
         </p:txBody>
@@ -4825,7 +4825,7 @@
                 </a:solidFill>
                 <a:latin typeface="Nunito Sans"/>
               </a:rPr>
-              <a:t>Omar：“卫生部门和几乎所有医生都说吸烟致癌，而且大家都在重复这句话。是诉诸权威和诉诸大众的谬误！”</a:t>
+              <a:t>一个男孩：“卫生部门和几乎所有医生都说吸烟致癌，而且大家都在重复这句话。是诉诸权威和诉诸大众的谬误！”</a:t>
             </a:r>
           </a:p>
         </p:txBody>
@@ -4873,7 +4873,7 @@
                 </a:solidFill>
                 <a:latin typeface="Nunito Sans"/>
               </a:rPr>
-              <a:t>有专家，也有“大家”……Omar 对吗？</a:t>
+              <a:t>有专家，也有“大家”……这个男孩对吗？</a:t>
             </a:r>
           </a:p>
           <a:p>
